--- a/docs/계약서돋보기_발표_최지수.pptx
+++ b/docs/계약서돋보기_발표_최지수.pptx
@@ -19,9 +19,10 @@
     <p:sldId id="267" r:id="rId13"/>
     <p:sldId id="268" r:id="rId14"/>
     <p:sldId id="269" r:id="rId15"/>
+    <p:sldId id="270" r:id="rId16"/>
   </p:sldIdLst>
   <p:notesMasterIdLst>
-    <p:notesMasterId r:id="rId16"/>
+    <p:notesMasterId r:id="rId17"/>
   </p:notesMasterIdLst>
   <p:sldSz cx="12192000" cy="6858000"/>
   <p:notesSz cx="6858000" cy="12192000"/>
@@ -867,7 +868,7 @@
           <a:p>
             <a:r>
               <a:rPr lang="en-US" dirty="0"/>
-              <a:t>마지막 줄이 이 프로젝트의 결론이다.</a:t>
+              <a:t>마지막 것은 발표 한 달 전에 사진 입력을 붙이면서 겪었다. 깨끗한 화면 캡처로 재니 99.6%가 나왔는데, 거기서 멈췄다면 또 같은 발표를 했을 것이다.</a:t>
             </a:r>
             <a:endParaRPr lang="en-US" dirty="0"/>
           </a:p>
@@ -955,7 +956,7 @@
           <a:p>
             <a:r>
               <a:rPr lang="en-US" dirty="0"/>
-              <a:t>발표 직전에 git rev-list --count HEAD 로 커밋 수를 다시 확인할 것.</a:t>
+              <a:t>마지막 줄이 이 프로젝트의 결론이다.</a:t>
             </a:r>
             <a:endParaRPr lang="en-US" dirty="0"/>
           </a:p>
@@ -979,6 +980,94 @@
             <a:fld id="{F7021451-1387-4CA6-816F-3879F97B5CBC}" type="slidenum">
               <a:rPr lang="en-US"/>
               <a:t>14</a:t>
+            </a:fld>
+            <a:endParaRPr lang="en-US"/>
+          </a:p>
+        </p:txBody>
+      </p:sp>
+    </p:spTree>
+    <p:extLst>
+      <p:ext uri="{BB962C8B-B14F-4D97-AF65-F5344CB8AC3E}">
+        <p14:creationId xmlns:p14="http://schemas.microsoft.com/office/powerpoint/2010/main" val="1024086991"/>
+      </p:ext>
+    </p:extLst>
+  </p:cSld>
+  <p:clrMapOvr>
+    <a:masterClrMapping/>
+  </p:clrMapOvr>
+</p:notes>
+</file>
+
+<file path=ppt/notesSlides/notesSlide15.xml><?xml version="1.0" encoding="utf-8"?>
+<p:notes xmlns:a="http://schemas.openxmlformats.org/drawingml/2006/main" xmlns:r="http://schemas.openxmlformats.org/officeDocument/2006/relationships" xmlns:p="http://schemas.openxmlformats.org/presentationml/2006/main">
+  <p:cSld>
+    <p:spTree>
+      <p:nvGrpSpPr>
+        <p:cNvPr id="1" name=""/>
+        <p:cNvGrpSpPr/>
+        <p:nvPr/>
+      </p:nvGrpSpPr>
+      <p:grpSpPr>
+        <a:xfrm>
+          <a:off x="0" y="0"/>
+          <a:ext cx="0" cy="0"/>
+          <a:chOff x="0" y="0"/>
+          <a:chExt cx="0" cy="0"/>
+        </a:xfrm>
+      </p:grpSpPr>
+      <p:sp>
+        <p:nvSpPr>
+          <p:cNvPr id="2" name="Slide Image Placeholder 1"/>
+          <p:cNvSpPr>
+            <a:spLocks noGrp="1" noRot="1" noChangeAspect="1"/>
+          </p:cNvSpPr>
+          <p:nvPr>
+            <p:ph type="sldImg"/>
+          </p:nvPr>
+        </p:nvSpPr>
+        <p:spPr/>
+      </p:sp>
+      <p:sp>
+        <p:nvSpPr>
+          <p:cNvPr id="3" name="Notes Placeholder 2"/>
+          <p:cNvSpPr>
+            <a:spLocks noGrp="1"/>
+          </p:cNvSpPr>
+          <p:nvPr>
+            <p:ph type="body" idx="1"/>
+          </p:nvPr>
+        </p:nvSpPr>
+        <p:spPr/>
+        <p:txBody>
+          <a:bodyPr/>
+          <a:lstStyle/>
+          <a:p>
+            <a:r>
+              <a:rPr lang="en-US" dirty="0"/>
+              <a:t>발표 직전에 git rev-list --count HEAD 로 커밋 수를 다시 확인할 것.</a:t>
+            </a:r>
+            <a:endParaRPr lang="en-US" dirty="0"/>
+          </a:p>
+        </p:txBody>
+      </p:sp>
+      <p:sp>
+        <p:nvSpPr>
+          <p:cNvPr id="4" name="Slide Number Placeholder 3"/>
+          <p:cNvSpPr>
+            <a:spLocks noGrp="1"/>
+          </p:cNvSpPr>
+          <p:nvPr>
+            <p:ph type="sldNum" sz="quarter" idx="10"/>
+          </p:nvPr>
+        </p:nvSpPr>
+        <p:spPr/>
+        <p:txBody>
+          <a:bodyPr/>
+          <a:lstStyle/>
+          <a:p>
+            <a:fld id="{F7021451-1387-4CA6-816F-3879F97B5CBC}" type="slidenum">
+              <a:rPr lang="en-US"/>
+              <a:t>15</a:t>
             </a:fld>
             <a:endParaRPr lang="en-US"/>
           </a:p>
@@ -4510,7 +4599,7 @@
                 <a:ea typeface="Malgun Gothic" pitchFamily="34" charset="-122"/>
                 <a:cs typeface="Malgun Gothic" pitchFamily="34" charset="-120"/>
               </a:rPr>
-              <a:t>배운 것</a:t>
+              <a:t>같은 함정에 세 번</a:t>
             </a:r>
             <a:endParaRPr lang="en-US" sz="3400" dirty="0"/>
           </a:p>
@@ -4518,18 +4607,57 @@
       </p:sp>
       <p:sp>
         <p:nvSpPr>
-          <p:cNvPr id="5" name="Shape 3"/>
+          <p:cNvPr id="5" name="Text 3"/>
+          <p:cNvSpPr txBox="1"/>
+          <p:nvPr/>
+        </p:nvSpPr>
+        <p:spPr>
+          <a:xfrm>
+            <a:off x="640080" y="1216152"/>
+            <a:ext cx="10911535" cy="365760"/>
+          </a:xfrm>
+          <a:prstGeom prst="rect">
+            <a:avLst/>
+          </a:prstGeom>
+          <a:noFill/>
+          <a:ln/>
+        </p:spPr>
+        <p:txBody>
+          <a:bodyPr wrap="square" lIns="0" tIns="0" rIns="0" bIns="0" rtlCol="0" anchor="ctr"/>
+          <a:lstStyle/>
+          <a:p>
+            <a:pPr indent="0" marL="0">
+              <a:buNone/>
+            </a:pPr>
+            <a:r>
+              <a:rPr lang="en-US" sz="1400" dirty="0">
+                <a:solidFill>
+                  <a:srgbClr val="6B7785"/>
+                </a:solidFill>
+                <a:latin typeface="Malgun Gothic" pitchFamily="34" charset="0"/>
+                <a:ea typeface="Malgun Gothic" pitchFamily="34" charset="-122"/>
+                <a:cs typeface="Malgun Gothic" pitchFamily="34" charset="-120"/>
+              </a:rPr>
+              <a:t>쉬운 표본으로 재고 그것을 성능이라 불렀다</a:t>
+            </a:r>
+            <a:endParaRPr lang="en-US" sz="1400" dirty="0"/>
+          </a:p>
+        </p:txBody>
+      </p:sp>
+      <p:sp>
+        <p:nvSpPr>
+          <p:cNvPr id="6" name="Shape 4"/>
           <p:cNvSpPr/>
           <p:nvPr/>
         </p:nvSpPr>
         <p:spPr>
           <a:xfrm>
-            <a:off x="640080" y="1874520"/>
-            <a:ext cx="10911535" cy="749808"/>
+            <a:off x="640080" y="1965960"/>
+            <a:ext cx="10911535" cy="969264"/>
           </a:xfrm>
           <a:prstGeom prst="roundRect">
             <a:avLst>
-              <a:gd name="adj" fmla="val 7317"/>
+              <a:gd name="adj" fmla="val 5660"/>
             </a:avLst>
           </a:prstGeom>
           <a:solidFill>
@@ -4545,121 +4673,252 @@
       </p:sp>
       <p:sp>
         <p:nvSpPr>
-          <p:cNvPr id="6" name="Shape 4"/>
+          <p:cNvPr id="7" name="Text 5"/>
+          <p:cNvSpPr txBox="1"/>
+          <p:nvPr/>
+        </p:nvSpPr>
+        <p:spPr>
+          <a:xfrm>
+            <a:off x="1005840" y="1965960"/>
+            <a:ext cx="1828800" cy="969264"/>
+          </a:xfrm>
+          <a:prstGeom prst="rect">
+            <a:avLst/>
+          </a:prstGeom>
+          <a:noFill/>
+          <a:ln/>
+        </p:spPr>
+        <p:txBody>
+          <a:bodyPr wrap="square" lIns="0" tIns="0" rIns="0" bIns="0" rtlCol="0" anchor="ctr"/>
+          <a:lstStyle/>
+          <a:p>
+            <a:pPr indent="0" marL="0">
+              <a:buNone/>
+            </a:pPr>
+            <a:r>
+              <a:rPr lang="en-US" sz="1300" b="1" dirty="0">
+                <a:solidFill>
+                  <a:srgbClr val="6B7785"/>
+                </a:solidFill>
+                <a:latin typeface="Malgun Gothic" pitchFamily="34" charset="0"/>
+                <a:ea typeface="Malgun Gothic" pitchFamily="34" charset="-122"/>
+                <a:cs typeface="Malgun Gothic" pitchFamily="34" charset="-120"/>
+              </a:rPr>
+              <a:t>평가 세트</a:t>
+            </a:r>
+            <a:endParaRPr lang="en-US" sz="1300" dirty="0"/>
+          </a:p>
+        </p:txBody>
+      </p:sp>
+      <p:sp>
+        <p:nvSpPr>
+          <p:cNvPr id="8" name="Text 6"/>
+          <p:cNvSpPr txBox="1"/>
+          <p:nvPr/>
+        </p:nvSpPr>
+        <p:spPr>
+          <a:xfrm>
+            <a:off x="2926080" y="2130552"/>
+            <a:ext cx="2743200" cy="310896"/>
+          </a:xfrm>
+          <a:prstGeom prst="rect">
+            <a:avLst/>
+          </a:prstGeom>
+          <a:noFill/>
+          <a:ln/>
+        </p:spPr>
+        <p:txBody>
+          <a:bodyPr wrap="square" lIns="0" tIns="0" rIns="0" bIns="0" rtlCol="0" anchor="ctr"/>
+          <a:lstStyle/>
+          <a:p>
+            <a:pPr indent="0" marL="0">
+              <a:buNone/>
+            </a:pPr>
+            <a:r>
+              <a:rPr lang="en-US" sz="1100" dirty="0">
+                <a:solidFill>
+                  <a:srgbClr val="6B7785"/>
+                </a:solidFill>
+                <a:latin typeface="Malgun Gothic" pitchFamily="34" charset="0"/>
+                <a:ea typeface="Malgun Gothic" pitchFamily="34" charset="-122"/>
+                <a:cs typeface="Malgun Gothic" pitchFamily="34" charset="-120"/>
+              </a:rPr>
+              <a:t>표준약관</a:t>
+            </a:r>
+            <a:endParaRPr lang="en-US" sz="1100" dirty="0"/>
+          </a:p>
+        </p:txBody>
+      </p:sp>
+      <p:sp>
+        <p:nvSpPr>
+          <p:cNvPr id="9" name="Text 7"/>
+          <p:cNvSpPr txBox="1"/>
+          <p:nvPr/>
+        </p:nvSpPr>
+        <p:spPr>
+          <a:xfrm>
+            <a:off x="2926080" y="2423160"/>
+            <a:ext cx="2743200" cy="384048"/>
+          </a:xfrm>
+          <a:prstGeom prst="rect">
+            <a:avLst/>
+          </a:prstGeom>
+          <a:noFill/>
+          <a:ln/>
+        </p:spPr>
+        <p:txBody>
+          <a:bodyPr wrap="square" lIns="0" tIns="0" rIns="0" bIns="0" rtlCol="0" anchor="ctr"/>
+          <a:lstStyle/>
+          <a:p>
+            <a:pPr indent="0" marL="0">
+              <a:buNone/>
+            </a:pPr>
+            <a:r>
+              <a:rPr lang="en-US" sz="2000" b="1" dirty="0">
+                <a:solidFill>
+                  <a:srgbClr val="1F2933"/>
+                </a:solidFill>
+                <a:latin typeface="Malgun Gothic" pitchFamily="34" charset="0"/>
+                <a:ea typeface="Malgun Gothic" pitchFamily="34" charset="-122"/>
+                <a:cs typeface="Malgun Gothic" pitchFamily="34" charset="-120"/>
+              </a:rPr>
+              <a:t>97.9%</a:t>
+            </a:r>
+            <a:endParaRPr lang="en-US" sz="2000" dirty="0"/>
+          </a:p>
+        </p:txBody>
+      </p:sp>
+      <p:sp>
+        <p:nvSpPr>
+          <p:cNvPr id="10" name="Text 8"/>
+          <p:cNvSpPr txBox="1"/>
+          <p:nvPr/>
+        </p:nvSpPr>
+        <p:spPr>
+          <a:xfrm>
+            <a:off x="5852160" y="1965960"/>
+            <a:ext cx="457200" cy="969264"/>
+          </a:xfrm>
+          <a:prstGeom prst="rect">
+            <a:avLst/>
+          </a:prstGeom>
+          <a:noFill/>
+          <a:ln/>
+        </p:spPr>
+        <p:txBody>
+          <a:bodyPr wrap="square" lIns="0" tIns="0" rIns="0" bIns="0" rtlCol="0" anchor="ctr"/>
+          <a:lstStyle/>
+          <a:p>
+            <a:pPr algn="ctr" indent="0" marL="0">
+              <a:buNone/>
+            </a:pPr>
+            <a:r>
+              <a:rPr lang="en-US" sz="2000" dirty="0">
+                <a:solidFill>
+                  <a:srgbClr val="B8C0C8"/>
+                </a:solidFill>
+                <a:latin typeface="Malgun Gothic" pitchFamily="34" charset="0"/>
+                <a:ea typeface="Malgun Gothic" pitchFamily="34" charset="-122"/>
+                <a:cs typeface="Malgun Gothic" pitchFamily="34" charset="-120"/>
+              </a:rPr>
+              <a:t>›</a:t>
+            </a:r>
+            <a:endParaRPr lang="en-US" sz="2000" dirty="0"/>
+          </a:p>
+        </p:txBody>
+      </p:sp>
+      <p:sp>
+        <p:nvSpPr>
+          <p:cNvPr id="11" name="Text 9"/>
+          <p:cNvSpPr txBox="1"/>
+          <p:nvPr/>
+        </p:nvSpPr>
+        <p:spPr>
+          <a:xfrm>
+            <a:off x="6492240" y="2130552"/>
+            <a:ext cx="3108960" cy="310896"/>
+          </a:xfrm>
+          <a:prstGeom prst="rect">
+            <a:avLst/>
+          </a:prstGeom>
+          <a:noFill/>
+          <a:ln/>
+        </p:spPr>
+        <p:txBody>
+          <a:bodyPr wrap="square" lIns="0" tIns="0" rIns="0" bIns="0" rtlCol="0" anchor="ctr"/>
+          <a:lstStyle/>
+          <a:p>
+            <a:pPr indent="0" marL="0">
+              <a:buNone/>
+            </a:pPr>
+            <a:r>
+              <a:rPr lang="en-US" sz="1100" dirty="0">
+                <a:solidFill>
+                  <a:srgbClr val="6B7785"/>
+                </a:solidFill>
+                <a:latin typeface="Malgun Gothic" pitchFamily="34" charset="0"/>
+                <a:ea typeface="Malgun Gothic" pitchFamily="34" charset="-122"/>
+                <a:cs typeface="Malgun Gothic" pitchFamily="34" charset="-120"/>
+              </a:rPr>
+              <a:t>실제 사설 약관</a:t>
+            </a:r>
+            <a:endParaRPr lang="en-US" sz="1100" dirty="0"/>
+          </a:p>
+        </p:txBody>
+      </p:sp>
+      <p:sp>
+        <p:nvSpPr>
+          <p:cNvPr id="12" name="Text 10"/>
+          <p:cNvSpPr txBox="1"/>
+          <p:nvPr/>
+        </p:nvSpPr>
+        <p:spPr>
+          <a:xfrm>
+            <a:off x="6492240" y="2423160"/>
+            <a:ext cx="3108960" cy="384048"/>
+          </a:xfrm>
+          <a:prstGeom prst="rect">
+            <a:avLst/>
+          </a:prstGeom>
+          <a:noFill/>
+          <a:ln/>
+        </p:spPr>
+        <p:txBody>
+          <a:bodyPr wrap="square" lIns="0" tIns="0" rIns="0" bIns="0" rtlCol="0" anchor="ctr"/>
+          <a:lstStyle/>
+          <a:p>
+            <a:pPr indent="0" marL="0">
+              <a:buNone/>
+            </a:pPr>
+            <a:r>
+              <a:rPr lang="en-US" sz="2000" b="1" dirty="0">
+                <a:solidFill>
+                  <a:srgbClr val="B45309"/>
+                </a:solidFill>
+                <a:latin typeface="Malgun Gothic" pitchFamily="34" charset="0"/>
+                <a:ea typeface="Malgun Gothic" pitchFamily="34" charset="-122"/>
+                <a:cs typeface="Malgun Gothic" pitchFamily="34" charset="-120"/>
+              </a:rPr>
+              <a:t>27.0%</a:t>
+            </a:r>
+            <a:endParaRPr lang="en-US" sz="2000" dirty="0"/>
+          </a:p>
+        </p:txBody>
+      </p:sp>
+      <p:sp>
+        <p:nvSpPr>
+          <p:cNvPr id="13" name="Shape 11"/>
           <p:cNvSpPr/>
           <p:nvPr/>
         </p:nvSpPr>
         <p:spPr>
           <a:xfrm>
-            <a:off x="960120" y="2066544"/>
-            <a:ext cx="365760" cy="365760"/>
-          </a:xfrm>
-          <a:prstGeom prst="ellipse">
-            <a:avLst/>
-          </a:prstGeom>
-          <a:solidFill>
-            <a:srgbClr val="FFFFFF"/>
-          </a:solidFill>
-          <a:ln w="12700">
-            <a:solidFill>
-              <a:srgbClr val="B8C0C8"/>
-            </a:solidFill>
-            <a:prstDash val="solid"/>
-          </a:ln>
-        </p:spPr>
-      </p:sp>
-      <p:sp>
-        <p:nvSpPr>
-          <p:cNvPr id="7" name="Text 5"/>
-          <p:cNvSpPr txBox="1"/>
-          <p:nvPr/>
-        </p:nvSpPr>
-        <p:spPr>
-          <a:xfrm>
-            <a:off x="960120" y="2066544"/>
-            <a:ext cx="365760" cy="365760"/>
-          </a:xfrm>
-          <a:prstGeom prst="rect">
-            <a:avLst/>
-          </a:prstGeom>
-          <a:noFill/>
-          <a:ln/>
-        </p:spPr>
-        <p:txBody>
-          <a:bodyPr wrap="square" lIns="0" tIns="0" rIns="0" bIns="0" rtlCol="0" anchor="ctr"/>
-          <a:lstStyle/>
-          <a:p>
-            <a:pPr algn="ctr" indent="0" marL="0">
-              <a:buNone/>
-            </a:pPr>
-            <a:r>
-              <a:rPr lang="en-US" sz="1200" b="1" dirty="0">
-                <a:solidFill>
-                  <a:srgbClr val="6B7785"/>
-                </a:solidFill>
-                <a:latin typeface="Malgun Gothic" pitchFamily="34" charset="0"/>
-                <a:ea typeface="Malgun Gothic" pitchFamily="34" charset="-122"/>
-                <a:cs typeface="Malgun Gothic" pitchFamily="34" charset="-120"/>
-              </a:rPr>
-              <a:t>1</a:t>
-            </a:r>
-            <a:endParaRPr lang="en-US" sz="1200" dirty="0"/>
-          </a:p>
-        </p:txBody>
-      </p:sp>
-      <p:sp>
-        <p:nvSpPr>
-          <p:cNvPr id="8" name="Text 6"/>
-          <p:cNvSpPr txBox="1"/>
-          <p:nvPr/>
-        </p:nvSpPr>
-        <p:spPr>
-          <a:xfrm>
-            <a:off x="1554480" y="1874520"/>
-            <a:ext cx="9601200" cy="749808"/>
-          </a:xfrm>
-          <a:prstGeom prst="rect">
-            <a:avLst/>
-          </a:prstGeom>
-          <a:noFill/>
-          <a:ln/>
-        </p:spPr>
-        <p:txBody>
-          <a:bodyPr wrap="square" lIns="0" tIns="0" rIns="0" bIns="0" rtlCol="0" anchor="ctr"/>
-          <a:lstStyle/>
-          <a:p>
-            <a:pPr indent="0" marL="0">
-              <a:buNone/>
-            </a:pPr>
-            <a:r>
-              <a:rPr lang="en-US" sz="1600" dirty="0">
-                <a:solidFill>
-                  <a:srgbClr val="1F2933"/>
-                </a:solidFill>
-                <a:latin typeface="Malgun Gothic" pitchFamily="34" charset="0"/>
-                <a:ea typeface="Malgun Gothic" pitchFamily="34" charset="-122"/>
-                <a:cs typeface="Malgun Gothic" pitchFamily="34" charset="-120"/>
-              </a:rPr>
-              <a:t>측정 대상을 잘못 고르면 아무리 정교하게 재도 소용없다</a:t>
-            </a:r>
-            <a:endParaRPr lang="en-US" sz="1600" dirty="0"/>
-          </a:p>
-        </p:txBody>
-      </p:sp>
-      <p:sp>
-        <p:nvSpPr>
-          <p:cNvPr id="9" name="Shape 7"/>
-          <p:cNvSpPr/>
-          <p:nvPr/>
-        </p:nvSpPr>
-        <p:spPr>
-          <a:xfrm>
-            <a:off x="640080" y="2770632"/>
-            <a:ext cx="10911535" cy="749808"/>
+            <a:off x="640080" y="3099816"/>
+            <a:ext cx="10911535" cy="969264"/>
           </a:xfrm>
           <a:prstGeom prst="roundRect">
             <a:avLst>
-              <a:gd name="adj" fmla="val 7317"/>
+              <a:gd name="adj" fmla="val 5660"/>
             </a:avLst>
           </a:prstGeom>
           <a:solidFill>
@@ -4675,251 +4934,252 @@
       </p:sp>
       <p:sp>
         <p:nvSpPr>
-          <p:cNvPr id="10" name="Shape 8"/>
+          <p:cNvPr id="14" name="Text 12"/>
+          <p:cNvSpPr txBox="1"/>
+          <p:nvPr/>
+        </p:nvSpPr>
+        <p:spPr>
+          <a:xfrm>
+            <a:off x="1005840" y="3099816"/>
+            <a:ext cx="1828800" cy="969264"/>
+          </a:xfrm>
+          <a:prstGeom prst="rect">
+            <a:avLst/>
+          </a:prstGeom>
+          <a:noFill/>
+          <a:ln/>
+        </p:spPr>
+        <p:txBody>
+          <a:bodyPr wrap="square" lIns="0" tIns="0" rIns="0" bIns="0" rtlCol="0" anchor="ctr"/>
+          <a:lstStyle/>
+          <a:p>
+            <a:pPr indent="0" marL="0">
+              <a:buNone/>
+            </a:pPr>
+            <a:r>
+              <a:rPr lang="en-US" sz="1300" b="1" dirty="0">
+                <a:solidFill>
+                  <a:srgbClr val="6B7785"/>
+                </a:solidFill>
+                <a:latin typeface="Malgun Gothic" pitchFamily="34" charset="0"/>
+                <a:ea typeface="Malgun Gothic" pitchFamily="34" charset="-122"/>
+                <a:cs typeface="Malgun Gothic" pitchFamily="34" charset="-120"/>
+              </a:rPr>
+              <a:t>ONNX 검증</a:t>
+            </a:r>
+            <a:endParaRPr lang="en-US" sz="1300" dirty="0"/>
+          </a:p>
+        </p:txBody>
+      </p:sp>
+      <p:sp>
+        <p:nvSpPr>
+          <p:cNvPr id="15" name="Text 13"/>
+          <p:cNvSpPr txBox="1"/>
+          <p:nvPr/>
+        </p:nvSpPr>
+        <p:spPr>
+          <a:xfrm>
+            <a:off x="2926080" y="3264408"/>
+            <a:ext cx="2743200" cy="310896"/>
+          </a:xfrm>
+          <a:prstGeom prst="rect">
+            <a:avLst/>
+          </a:prstGeom>
+          <a:noFill/>
+          <a:ln/>
+        </p:spPr>
+        <p:txBody>
+          <a:bodyPr wrap="square" lIns="0" tIns="0" rIns="0" bIns="0" rtlCol="0" anchor="ctr"/>
+          <a:lstStyle/>
+          <a:p>
+            <a:pPr indent="0" marL="0">
+              <a:buNone/>
+            </a:pPr>
+            <a:r>
+              <a:rPr lang="en-US" sz="1100" dirty="0">
+                <a:solidFill>
+                  <a:srgbClr val="6B7785"/>
+                </a:solidFill>
+                <a:latin typeface="Malgun Gothic" pitchFamily="34" charset="0"/>
+                <a:ea typeface="Malgun Gothic" pitchFamily="34" charset="-122"/>
+                <a:cs typeface="Malgun Gothic" pitchFamily="34" charset="-120"/>
+              </a:rPr>
+              <a:t>짧은 문장 3개</a:t>
+            </a:r>
+            <a:endParaRPr lang="en-US" sz="1100" dirty="0"/>
+          </a:p>
+        </p:txBody>
+      </p:sp>
+      <p:sp>
+        <p:nvSpPr>
+          <p:cNvPr id="16" name="Text 14"/>
+          <p:cNvSpPr txBox="1"/>
+          <p:nvPr/>
+        </p:nvSpPr>
+        <p:spPr>
+          <a:xfrm>
+            <a:off x="2926080" y="3557016"/>
+            <a:ext cx="2743200" cy="384048"/>
+          </a:xfrm>
+          <a:prstGeom prst="rect">
+            <a:avLst/>
+          </a:prstGeom>
+          <a:noFill/>
+          <a:ln/>
+        </p:spPr>
+        <p:txBody>
+          <a:bodyPr wrap="square" lIns="0" tIns="0" rIns="0" bIns="0" rtlCol="0" anchor="ctr"/>
+          <a:lstStyle/>
+          <a:p>
+            <a:pPr indent="0" marL="0">
+              <a:buNone/>
+            </a:pPr>
+            <a:r>
+              <a:rPr lang="en-US" sz="2000" b="1" dirty="0">
+                <a:solidFill>
+                  <a:srgbClr val="1F2933"/>
+                </a:solidFill>
+                <a:latin typeface="Malgun Gothic" pitchFamily="34" charset="0"/>
+                <a:ea typeface="Malgun Gothic" pitchFamily="34" charset="-122"/>
+                <a:cs typeface="Malgun Gothic" pitchFamily="34" charset="-120"/>
+              </a:rPr>
+              <a:t>동일</a:t>
+            </a:r>
+            <a:endParaRPr lang="en-US" sz="2000" dirty="0"/>
+          </a:p>
+        </p:txBody>
+      </p:sp>
+      <p:sp>
+        <p:nvSpPr>
+          <p:cNvPr id="17" name="Text 15"/>
+          <p:cNvSpPr txBox="1"/>
+          <p:nvPr/>
+        </p:nvSpPr>
+        <p:spPr>
+          <a:xfrm>
+            <a:off x="5852160" y="3099816"/>
+            <a:ext cx="457200" cy="969264"/>
+          </a:xfrm>
+          <a:prstGeom prst="rect">
+            <a:avLst/>
+          </a:prstGeom>
+          <a:noFill/>
+          <a:ln/>
+        </p:spPr>
+        <p:txBody>
+          <a:bodyPr wrap="square" lIns="0" tIns="0" rIns="0" bIns="0" rtlCol="0" anchor="ctr"/>
+          <a:lstStyle/>
+          <a:p>
+            <a:pPr algn="ctr" indent="0" marL="0">
+              <a:buNone/>
+            </a:pPr>
+            <a:r>
+              <a:rPr lang="en-US" sz="2000" dirty="0">
+                <a:solidFill>
+                  <a:srgbClr val="B8C0C8"/>
+                </a:solidFill>
+                <a:latin typeface="Malgun Gothic" pitchFamily="34" charset="0"/>
+                <a:ea typeface="Malgun Gothic" pitchFamily="34" charset="-122"/>
+                <a:cs typeface="Malgun Gothic" pitchFamily="34" charset="-120"/>
+              </a:rPr>
+              <a:t>›</a:t>
+            </a:r>
+            <a:endParaRPr lang="en-US" sz="2000" dirty="0"/>
+          </a:p>
+        </p:txBody>
+      </p:sp>
+      <p:sp>
+        <p:nvSpPr>
+          <p:cNvPr id="18" name="Text 16"/>
+          <p:cNvSpPr txBox="1"/>
+          <p:nvPr/>
+        </p:nvSpPr>
+        <p:spPr>
+          <a:xfrm>
+            <a:off x="6492240" y="3264408"/>
+            <a:ext cx="3108960" cy="310896"/>
+          </a:xfrm>
+          <a:prstGeom prst="rect">
+            <a:avLst/>
+          </a:prstGeom>
+          <a:noFill/>
+          <a:ln/>
+        </p:spPr>
+        <p:txBody>
+          <a:bodyPr wrap="square" lIns="0" tIns="0" rIns="0" bIns="0" rtlCol="0" anchor="ctr"/>
+          <a:lstStyle/>
+          <a:p>
+            <a:pPr indent="0" marL="0">
+              <a:buNone/>
+            </a:pPr>
+            <a:r>
+              <a:rPr lang="en-US" sz="1100" dirty="0">
+                <a:solidFill>
+                  <a:srgbClr val="6B7785"/>
+                </a:solidFill>
+                <a:latin typeface="Malgun Gothic" pitchFamily="34" charset="0"/>
+                <a:ea typeface="Malgun Gothic" pitchFamily="34" charset="-122"/>
+                <a:cs typeface="Malgun Gothic" pitchFamily="34" charset="-120"/>
+              </a:rPr>
+              <a:t>긴 조항</a:t>
+            </a:r>
+            <a:endParaRPr lang="en-US" sz="1100" dirty="0"/>
+          </a:p>
+        </p:txBody>
+      </p:sp>
+      <p:sp>
+        <p:nvSpPr>
+          <p:cNvPr id="19" name="Text 17"/>
+          <p:cNvSpPr txBox="1"/>
+          <p:nvPr/>
+        </p:nvSpPr>
+        <p:spPr>
+          <a:xfrm>
+            <a:off x="6492240" y="3557016"/>
+            <a:ext cx="3108960" cy="384048"/>
+          </a:xfrm>
+          <a:prstGeom prst="rect">
+            <a:avLst/>
+          </a:prstGeom>
+          <a:noFill/>
+          <a:ln/>
+        </p:spPr>
+        <p:txBody>
+          <a:bodyPr wrap="square" lIns="0" tIns="0" rIns="0" bIns="0" rtlCol="0" anchor="ctr"/>
+          <a:lstStyle/>
+          <a:p>
+            <a:pPr indent="0" marL="0">
+              <a:buNone/>
+            </a:pPr>
+            <a:r>
+              <a:rPr lang="en-US" sz="2000" b="1" dirty="0">
+                <a:solidFill>
+                  <a:srgbClr val="B45309"/>
+                </a:solidFill>
+                <a:latin typeface="Malgun Gothic" pitchFamily="34" charset="0"/>
+                <a:ea typeface="Malgun Gothic" pitchFamily="34" charset="-122"/>
+                <a:cs typeface="Malgun Gothic" pitchFamily="34" charset="-120"/>
+              </a:rPr>
+              <a:t>1위가 뒤바뀜</a:t>
+            </a:r>
+            <a:endParaRPr lang="en-US" sz="2000" dirty="0"/>
+          </a:p>
+        </p:txBody>
+      </p:sp>
+      <p:sp>
+        <p:nvSpPr>
+          <p:cNvPr id="20" name="Shape 18"/>
           <p:cNvSpPr/>
           <p:nvPr/>
         </p:nvSpPr>
         <p:spPr>
           <a:xfrm>
-            <a:off x="960120" y="2962656"/>
-            <a:ext cx="365760" cy="365760"/>
-          </a:xfrm>
-          <a:prstGeom prst="ellipse">
-            <a:avLst/>
-          </a:prstGeom>
-          <a:solidFill>
-            <a:srgbClr val="FFFFFF"/>
-          </a:solidFill>
-          <a:ln w="12700">
-            <a:solidFill>
-              <a:srgbClr val="B8C0C8"/>
-            </a:solidFill>
-            <a:prstDash val="solid"/>
-          </a:ln>
-        </p:spPr>
-      </p:sp>
-      <p:sp>
-        <p:nvSpPr>
-          <p:cNvPr id="11" name="Text 9"/>
-          <p:cNvSpPr txBox="1"/>
-          <p:nvPr/>
-        </p:nvSpPr>
-        <p:spPr>
-          <a:xfrm>
-            <a:off x="960120" y="2962656"/>
-            <a:ext cx="365760" cy="365760"/>
-          </a:xfrm>
-          <a:prstGeom prst="rect">
-            <a:avLst/>
-          </a:prstGeom>
-          <a:noFill/>
-          <a:ln/>
-        </p:spPr>
-        <p:txBody>
-          <a:bodyPr wrap="square" lIns="0" tIns="0" rIns="0" bIns="0" rtlCol="0" anchor="ctr"/>
-          <a:lstStyle/>
-          <a:p>
-            <a:pPr algn="ctr" indent="0" marL="0">
-              <a:buNone/>
-            </a:pPr>
-            <a:r>
-              <a:rPr lang="en-US" sz="1200" b="1" dirty="0">
-                <a:solidFill>
-                  <a:srgbClr val="6B7785"/>
-                </a:solidFill>
-                <a:latin typeface="Malgun Gothic" pitchFamily="34" charset="0"/>
-                <a:ea typeface="Malgun Gothic" pitchFamily="34" charset="-122"/>
-                <a:cs typeface="Malgun Gothic" pitchFamily="34" charset="-120"/>
-              </a:rPr>
-              <a:t>2</a:t>
-            </a:r>
-            <a:endParaRPr lang="en-US" sz="1200" dirty="0"/>
-          </a:p>
-        </p:txBody>
-      </p:sp>
-      <p:sp>
-        <p:nvSpPr>
-          <p:cNvPr id="12" name="Text 10"/>
-          <p:cNvSpPr txBox="1"/>
-          <p:nvPr/>
-        </p:nvSpPr>
-        <p:spPr>
-          <a:xfrm>
-            <a:off x="1554480" y="2770632"/>
-            <a:ext cx="9601200" cy="749808"/>
-          </a:xfrm>
-          <a:prstGeom prst="rect">
-            <a:avLst/>
-          </a:prstGeom>
-          <a:noFill/>
-          <a:ln/>
-        </p:spPr>
-        <p:txBody>
-          <a:bodyPr wrap="square" lIns="0" tIns="0" rIns="0" bIns="0" rtlCol="0" anchor="ctr"/>
-          <a:lstStyle/>
-          <a:p>
-            <a:pPr indent="0" marL="0">
-              <a:buNone/>
-            </a:pPr>
-            <a:r>
-              <a:rPr lang="en-US" sz="1600" dirty="0">
-                <a:solidFill>
-                  <a:srgbClr val="1F2933"/>
-                </a:solidFill>
-                <a:latin typeface="Malgun Gothic" pitchFamily="34" charset="0"/>
-                <a:ea typeface="Malgun Gothic" pitchFamily="34" charset="-122"/>
-                <a:cs typeface="Malgun Gothic" pitchFamily="34" charset="-120"/>
-              </a:rPr>
-              <a:t>쉬운 표본으로 잰 수치는 실사용을 대표하지 않는다</a:t>
-            </a:r>
-            <a:endParaRPr lang="en-US" sz="1600" dirty="0"/>
-          </a:p>
-        </p:txBody>
-      </p:sp>
-      <p:sp>
-        <p:nvSpPr>
-          <p:cNvPr id="13" name="Shape 11"/>
-          <p:cNvSpPr/>
-          <p:nvPr/>
-        </p:nvSpPr>
-        <p:spPr>
-          <a:xfrm>
-            <a:off x="640080" y="3666744"/>
-            <a:ext cx="10911535" cy="749808"/>
+            <a:off x="640080" y="4233672"/>
+            <a:ext cx="10911535" cy="969264"/>
           </a:xfrm>
           <a:prstGeom prst="roundRect">
             <a:avLst>
-              <a:gd name="adj" fmla="val 7317"/>
-            </a:avLst>
-          </a:prstGeom>
-          <a:solidFill>
-            <a:srgbClr val="F4F5F7"/>
-          </a:solidFill>
-          <a:ln w="9525">
-            <a:solidFill>
-              <a:srgbClr val="D7DBE0"/>
-            </a:solidFill>
-            <a:prstDash val="solid"/>
-          </a:ln>
-        </p:spPr>
-      </p:sp>
-      <p:sp>
-        <p:nvSpPr>
-          <p:cNvPr id="14" name="Shape 12"/>
-          <p:cNvSpPr/>
-          <p:nvPr/>
-        </p:nvSpPr>
-        <p:spPr>
-          <a:xfrm>
-            <a:off x="960120" y="3858768"/>
-            <a:ext cx="365760" cy="365760"/>
-          </a:xfrm>
-          <a:prstGeom prst="ellipse">
-            <a:avLst/>
-          </a:prstGeom>
-          <a:solidFill>
-            <a:srgbClr val="FFFFFF"/>
-          </a:solidFill>
-          <a:ln w="12700">
-            <a:solidFill>
-              <a:srgbClr val="B8C0C8"/>
-            </a:solidFill>
-            <a:prstDash val="solid"/>
-          </a:ln>
-        </p:spPr>
-      </p:sp>
-      <p:sp>
-        <p:nvSpPr>
-          <p:cNvPr id="15" name="Text 13"/>
-          <p:cNvSpPr txBox="1"/>
-          <p:nvPr/>
-        </p:nvSpPr>
-        <p:spPr>
-          <a:xfrm>
-            <a:off x="960120" y="3858768"/>
-            <a:ext cx="365760" cy="365760"/>
-          </a:xfrm>
-          <a:prstGeom prst="rect">
-            <a:avLst/>
-          </a:prstGeom>
-          <a:noFill/>
-          <a:ln/>
-        </p:spPr>
-        <p:txBody>
-          <a:bodyPr wrap="square" lIns="0" tIns="0" rIns="0" bIns="0" rtlCol="0" anchor="ctr"/>
-          <a:lstStyle/>
-          <a:p>
-            <a:pPr algn="ctr" indent="0" marL="0">
-              <a:buNone/>
-            </a:pPr>
-            <a:r>
-              <a:rPr lang="en-US" sz="1200" b="1" dirty="0">
-                <a:solidFill>
-                  <a:srgbClr val="6B7785"/>
-                </a:solidFill>
-                <a:latin typeface="Malgun Gothic" pitchFamily="34" charset="0"/>
-                <a:ea typeface="Malgun Gothic" pitchFamily="34" charset="-122"/>
-                <a:cs typeface="Malgun Gothic" pitchFamily="34" charset="-120"/>
-              </a:rPr>
-              <a:t>3</a:t>
-            </a:r>
-            <a:endParaRPr lang="en-US" sz="1200" dirty="0"/>
-          </a:p>
-        </p:txBody>
-      </p:sp>
-      <p:sp>
-        <p:nvSpPr>
-          <p:cNvPr id="16" name="Text 14"/>
-          <p:cNvSpPr txBox="1"/>
-          <p:nvPr/>
-        </p:nvSpPr>
-        <p:spPr>
-          <a:xfrm>
-            <a:off x="1554480" y="3666744"/>
-            <a:ext cx="9601200" cy="749808"/>
-          </a:xfrm>
-          <a:prstGeom prst="rect">
-            <a:avLst/>
-          </a:prstGeom>
-          <a:noFill/>
-          <a:ln/>
-        </p:spPr>
-        <p:txBody>
-          <a:bodyPr wrap="square" lIns="0" tIns="0" rIns="0" bIns="0" rtlCol="0" anchor="ctr"/>
-          <a:lstStyle/>
-          <a:p>
-            <a:pPr indent="0" marL="0">
-              <a:buNone/>
-            </a:pPr>
-            <a:r>
-              <a:rPr lang="en-US" sz="1600" dirty="0">
-                <a:solidFill>
-                  <a:srgbClr val="1F2933"/>
-                </a:solidFill>
-                <a:latin typeface="Malgun Gothic" pitchFamily="34" charset="0"/>
-                <a:ea typeface="Malgun Gothic" pitchFamily="34" charset="-122"/>
-                <a:cs typeface="Malgun Gothic" pitchFamily="34" charset="-120"/>
-              </a:rPr>
-              <a:t>검증 조건은 실제 사용 조건과 같아야 한다</a:t>
-            </a:r>
-            <a:endParaRPr lang="en-US" sz="1600" dirty="0"/>
-          </a:p>
-        </p:txBody>
-      </p:sp>
-      <p:sp>
-        <p:nvSpPr>
-          <p:cNvPr id="17" name="Shape 15"/>
-          <p:cNvSpPr/>
-          <p:nvPr/>
-        </p:nvSpPr>
-        <p:spPr>
-          <a:xfrm>
-            <a:off x="640080" y="4562856"/>
-            <a:ext cx="10911535" cy="749808"/>
-          </a:xfrm>
-          <a:prstGeom prst="roundRect">
-            <a:avLst>
-              <a:gd name="adj" fmla="val 7317"/>
+              <a:gd name="adj" fmla="val 5660"/>
             </a:avLst>
           </a:prstGeom>
           <a:solidFill>
@@ -4935,39 +5195,131 @@
       </p:sp>
       <p:sp>
         <p:nvSpPr>
-          <p:cNvPr id="18" name="Shape 16"/>
-          <p:cNvSpPr/>
-          <p:nvPr/>
-        </p:nvSpPr>
-        <p:spPr>
-          <a:xfrm>
-            <a:off x="960120" y="4754880"/>
-            <a:ext cx="365760" cy="365760"/>
-          </a:xfrm>
-          <a:prstGeom prst="ellipse">
-            <a:avLst/>
-          </a:prstGeom>
-          <a:solidFill>
-            <a:srgbClr val="0E7C7B"/>
-          </a:solidFill>
-          <a:ln w="12700">
-            <a:solidFill>
-              <a:srgbClr val="0E7C7B"/>
-            </a:solidFill>
-            <a:prstDash val="solid"/>
-          </a:ln>
-        </p:spPr>
-      </p:sp>
-      <p:sp>
-        <p:nvSpPr>
-          <p:cNvPr id="19" name="Text 17"/>
-          <p:cNvSpPr txBox="1"/>
-          <p:nvPr/>
-        </p:nvSpPr>
-        <p:spPr>
-          <a:xfrm>
-            <a:off x="960120" y="4754880"/>
-            <a:ext cx="365760" cy="365760"/>
+          <p:cNvPr id="21" name="Text 19"/>
+          <p:cNvSpPr txBox="1"/>
+          <p:nvPr/>
+        </p:nvSpPr>
+        <p:spPr>
+          <a:xfrm>
+            <a:off x="1005840" y="4233672"/>
+            <a:ext cx="1828800" cy="969264"/>
+          </a:xfrm>
+          <a:prstGeom prst="rect">
+            <a:avLst/>
+          </a:prstGeom>
+          <a:noFill/>
+          <a:ln/>
+        </p:spPr>
+        <p:txBody>
+          <a:bodyPr wrap="square" lIns="0" tIns="0" rIns="0" bIns="0" rtlCol="0" anchor="ctr"/>
+          <a:lstStyle/>
+          <a:p>
+            <a:pPr indent="0" marL="0">
+              <a:buNone/>
+            </a:pPr>
+            <a:r>
+              <a:rPr lang="en-US" sz="1300" b="1" dirty="0">
+                <a:solidFill>
+                  <a:srgbClr val="0E7C7B"/>
+                </a:solidFill>
+                <a:latin typeface="Malgun Gothic" pitchFamily="34" charset="0"/>
+                <a:ea typeface="Malgun Gothic" pitchFamily="34" charset="-122"/>
+                <a:cs typeface="Malgun Gothic" pitchFamily="34" charset="-120"/>
+              </a:rPr>
+              <a:t>사진 인식</a:t>
+            </a:r>
+            <a:endParaRPr lang="en-US" sz="1300" dirty="0"/>
+          </a:p>
+        </p:txBody>
+      </p:sp>
+      <p:sp>
+        <p:nvSpPr>
+          <p:cNvPr id="22" name="Text 20"/>
+          <p:cNvSpPr txBox="1"/>
+          <p:nvPr/>
+        </p:nvSpPr>
+        <p:spPr>
+          <a:xfrm>
+            <a:off x="2926080" y="4398264"/>
+            <a:ext cx="2743200" cy="310896"/>
+          </a:xfrm>
+          <a:prstGeom prst="rect">
+            <a:avLst/>
+          </a:prstGeom>
+          <a:noFill/>
+          <a:ln/>
+        </p:spPr>
+        <p:txBody>
+          <a:bodyPr wrap="square" lIns="0" tIns="0" rIns="0" bIns="0" rtlCol="0" anchor="ctr"/>
+          <a:lstStyle/>
+          <a:p>
+            <a:pPr indent="0" marL="0">
+              <a:buNone/>
+            </a:pPr>
+            <a:r>
+              <a:rPr lang="en-US" sz="1100" dirty="0">
+                <a:solidFill>
+                  <a:srgbClr val="6B7785"/>
+                </a:solidFill>
+                <a:latin typeface="Malgun Gothic" pitchFamily="34" charset="0"/>
+                <a:ea typeface="Malgun Gothic" pitchFamily="34" charset="-122"/>
+                <a:cs typeface="Malgun Gothic" pitchFamily="34" charset="-120"/>
+              </a:rPr>
+              <a:t>깨끗한 캡처</a:t>
+            </a:r>
+            <a:endParaRPr lang="en-US" sz="1100" dirty="0"/>
+          </a:p>
+        </p:txBody>
+      </p:sp>
+      <p:sp>
+        <p:nvSpPr>
+          <p:cNvPr id="23" name="Text 21"/>
+          <p:cNvSpPr txBox="1"/>
+          <p:nvPr/>
+        </p:nvSpPr>
+        <p:spPr>
+          <a:xfrm>
+            <a:off x="2926080" y="4690872"/>
+            <a:ext cx="2743200" cy="384048"/>
+          </a:xfrm>
+          <a:prstGeom prst="rect">
+            <a:avLst/>
+          </a:prstGeom>
+          <a:noFill/>
+          <a:ln/>
+        </p:spPr>
+        <p:txBody>
+          <a:bodyPr wrap="square" lIns="0" tIns="0" rIns="0" bIns="0" rtlCol="0" anchor="ctr"/>
+          <a:lstStyle/>
+          <a:p>
+            <a:pPr indent="0" marL="0">
+              <a:buNone/>
+            </a:pPr>
+            <a:r>
+              <a:rPr lang="en-US" sz="2000" b="1" dirty="0">
+                <a:solidFill>
+                  <a:srgbClr val="1F2933"/>
+                </a:solidFill>
+                <a:latin typeface="Malgun Gothic" pitchFamily="34" charset="0"/>
+                <a:ea typeface="Malgun Gothic" pitchFamily="34" charset="-122"/>
+                <a:cs typeface="Malgun Gothic" pitchFamily="34" charset="-120"/>
+              </a:rPr>
+              <a:t>99.6%</a:t>
+            </a:r>
+            <a:endParaRPr lang="en-US" sz="2000" dirty="0"/>
+          </a:p>
+        </p:txBody>
+      </p:sp>
+      <p:sp>
+        <p:nvSpPr>
+          <p:cNvPr id="24" name="Text 22"/>
+          <p:cNvSpPr txBox="1"/>
+          <p:nvPr/>
+        </p:nvSpPr>
+        <p:spPr>
+          <a:xfrm>
+            <a:off x="5852160" y="4233672"/>
+            <a:ext cx="457200" cy="969264"/>
           </a:xfrm>
           <a:prstGeom prst="rect">
             <a:avLst/>
@@ -4983,62 +5335,101 @@
               <a:buNone/>
             </a:pPr>
             <a:r>
-              <a:rPr lang="en-US" sz="1200" b="1" dirty="0">
-                <a:solidFill>
-                  <a:srgbClr val="FFFFFF"/>
-                </a:solidFill>
-                <a:latin typeface="Malgun Gothic" pitchFamily="34" charset="0"/>
-                <a:ea typeface="Malgun Gothic" pitchFamily="34" charset="-122"/>
-                <a:cs typeface="Malgun Gothic" pitchFamily="34" charset="-120"/>
-              </a:rPr>
-              <a:t>4</a:t>
-            </a:r>
-            <a:endParaRPr lang="en-US" sz="1200" dirty="0"/>
-          </a:p>
-        </p:txBody>
-      </p:sp>
-      <p:sp>
-        <p:nvSpPr>
-          <p:cNvPr id="20" name="Text 18"/>
-          <p:cNvSpPr txBox="1"/>
-          <p:nvPr/>
-        </p:nvSpPr>
-        <p:spPr>
-          <a:xfrm>
-            <a:off x="1554480" y="4562856"/>
-            <a:ext cx="9601200" cy="749808"/>
-          </a:xfrm>
-          <a:prstGeom prst="rect">
-            <a:avLst/>
-          </a:prstGeom>
-          <a:noFill/>
-          <a:ln/>
-        </p:spPr>
-        <p:txBody>
-          <a:bodyPr wrap="square" lIns="0" tIns="0" rIns="0" bIns="0" rtlCol="0" anchor="ctr"/>
-          <a:lstStyle/>
-          <a:p>
-            <a:pPr indent="0" marL="0">
-              <a:buNone/>
-            </a:pPr>
-            <a:r>
-              <a:rPr lang="en-US" sz="1800" b="1" dirty="0">
-                <a:solidFill>
-                  <a:srgbClr val="0E7C7B"/>
-                </a:solidFill>
-                <a:latin typeface="Malgun Gothic" pitchFamily="34" charset="0"/>
-                <a:ea typeface="Malgun Gothic" pitchFamily="34" charset="-122"/>
-                <a:cs typeface="Malgun Gothic" pitchFamily="34" charset="-120"/>
-              </a:rPr>
-              <a:t>성능을 못 올리면 약속을 바꾼다</a:t>
-            </a:r>
-            <a:endParaRPr lang="en-US" sz="1800" dirty="0"/>
-          </a:p>
-        </p:txBody>
-      </p:sp>
-      <p:sp>
-        <p:nvSpPr>
-          <p:cNvPr id="21" name="Text 19"/>
+              <a:rPr lang="en-US" sz="2000" dirty="0">
+                <a:solidFill>
+                  <a:srgbClr val="B8C0C8"/>
+                </a:solidFill>
+                <a:latin typeface="Malgun Gothic" pitchFamily="34" charset="0"/>
+                <a:ea typeface="Malgun Gothic" pitchFamily="34" charset="-122"/>
+                <a:cs typeface="Malgun Gothic" pitchFamily="34" charset="-120"/>
+              </a:rPr>
+              <a:t>›</a:t>
+            </a:r>
+            <a:endParaRPr lang="en-US" sz="2000" dirty="0"/>
+          </a:p>
+        </p:txBody>
+      </p:sp>
+      <p:sp>
+        <p:nvSpPr>
+          <p:cNvPr id="25" name="Text 23"/>
+          <p:cNvSpPr txBox="1"/>
+          <p:nvPr/>
+        </p:nvSpPr>
+        <p:spPr>
+          <a:xfrm>
+            <a:off x="6492240" y="4398264"/>
+            <a:ext cx="3108960" cy="310896"/>
+          </a:xfrm>
+          <a:prstGeom prst="rect">
+            <a:avLst/>
+          </a:prstGeom>
+          <a:noFill/>
+          <a:ln/>
+        </p:spPr>
+        <p:txBody>
+          <a:bodyPr wrap="square" lIns="0" tIns="0" rIns="0" bIns="0" rtlCol="0" anchor="ctr"/>
+          <a:lstStyle/>
+          <a:p>
+            <a:pPr indent="0" marL="0">
+              <a:buNone/>
+            </a:pPr>
+            <a:r>
+              <a:rPr lang="en-US" sz="1100" dirty="0">
+                <a:solidFill>
+                  <a:srgbClr val="6B7785"/>
+                </a:solidFill>
+                <a:latin typeface="Malgun Gothic" pitchFamily="34" charset="0"/>
+                <a:ea typeface="Malgun Gothic" pitchFamily="34" charset="-122"/>
+                <a:cs typeface="Malgun Gothic" pitchFamily="34" charset="-120"/>
+              </a:rPr>
+              <a:t>실제 사진</a:t>
+            </a:r>
+            <a:endParaRPr lang="en-US" sz="1100" dirty="0"/>
+          </a:p>
+        </p:txBody>
+      </p:sp>
+      <p:sp>
+        <p:nvSpPr>
+          <p:cNvPr id="26" name="Text 24"/>
+          <p:cNvSpPr txBox="1"/>
+          <p:nvPr/>
+        </p:nvSpPr>
+        <p:spPr>
+          <a:xfrm>
+            <a:off x="6492240" y="4690872"/>
+            <a:ext cx="3108960" cy="384048"/>
+          </a:xfrm>
+          <a:prstGeom prst="rect">
+            <a:avLst/>
+          </a:prstGeom>
+          <a:noFill/>
+          <a:ln/>
+        </p:spPr>
+        <p:txBody>
+          <a:bodyPr wrap="square" lIns="0" tIns="0" rIns="0" bIns="0" rtlCol="0" anchor="ctr"/>
+          <a:lstStyle/>
+          <a:p>
+            <a:pPr indent="0" marL="0">
+              <a:buNone/>
+            </a:pPr>
+            <a:r>
+              <a:rPr lang="en-US" sz="2000" b="1" dirty="0">
+                <a:solidFill>
+                  <a:srgbClr val="B45309"/>
+                </a:solidFill>
+                <a:latin typeface="Malgun Gothic" pitchFamily="34" charset="0"/>
+                <a:ea typeface="Malgun Gothic" pitchFamily="34" charset="-122"/>
+                <a:cs typeface="Malgun Gothic" pitchFamily="34" charset="-120"/>
+              </a:rPr>
+              <a:t>16.8%</a:t>
+            </a:r>
+            <a:endParaRPr lang="en-US" sz="2000" dirty="0"/>
+          </a:p>
+        </p:txBody>
+      </p:sp>
+      <p:sp>
+        <p:nvSpPr>
+          <p:cNvPr id="27" name="Text 25"/>
           <p:cNvSpPr txBox="1"/>
           <p:nvPr/>
         </p:nvSpPr>
@@ -5061,15 +5452,15 @@
               <a:buNone/>
             </a:pPr>
             <a:r>
-              <a:rPr lang="en-US" sz="1500" dirty="0">
-                <a:solidFill>
-                  <a:srgbClr val="1F2933"/>
-                </a:solidFill>
-                <a:latin typeface="Malgun Gothic" pitchFamily="34" charset="0"/>
-                <a:ea typeface="Malgun Gothic" pitchFamily="34" charset="-122"/>
-                <a:cs typeface="Malgun Gothic" pitchFamily="34" charset="-120"/>
-              </a:rPr>
-              <a:t>확신도를 표시할 근거가 없으면 표시를 없애는 것이 사용자에게 정직하다.</a:t>
+              <a:rPr lang="en-US" sz="1500" b="1" dirty="0">
+                <a:solidFill>
+                  <a:srgbClr val="0E7C7B"/>
+                </a:solidFill>
+                <a:latin typeface="Malgun Gothic" pitchFamily="34" charset="0"/>
+                <a:ea typeface="Malgun Gothic" pitchFamily="34" charset="-122"/>
+                <a:cs typeface="Malgun Gothic" pitchFamily="34" charset="-120"/>
+              </a:rPr>
+              <a:t>세 번째는 발표 전에 스스로 잡았다. 다만 실제 종이를 찍은 사진으로는 아직 재지 않았다.</a:t>
             </a:r>
             <a:endParaRPr lang="en-US" sz="1500" dirty="0"/>
           </a:p>
@@ -5086,6 +5477,830 @@
 <file path=ppt/slides/slide14.xml><?xml version="1.0" encoding="utf-8"?>
 <p:sld xmlns:a="http://schemas.openxmlformats.org/drawingml/2006/main" xmlns:r="http://schemas.openxmlformats.org/officeDocument/2006/relationships" xmlns:p="http://schemas.openxmlformats.org/presentationml/2006/main">
   <p:cSld name="Slide 14">
+    <p:bg>
+      <p:bgPr>
+        <a:solidFill>
+          <a:srgbClr val="FFFFFF"/>
+        </a:solidFill>
+      </p:bgPr>
+    </p:bg>
+    <p:spTree>
+      <p:nvGrpSpPr>
+        <p:cNvPr id="1" name=""/>
+        <p:cNvGrpSpPr/>
+        <p:nvPr/>
+      </p:nvGrpSpPr>
+      <p:grpSpPr>
+        <a:xfrm>
+          <a:off x="0" y="0"/>
+          <a:ext cx="0" cy="0"/>
+          <a:chOff x="0" y="0"/>
+          <a:chExt cx="0" cy="0"/>
+        </a:xfrm>
+      </p:grpSpPr>
+      <p:sp>
+        <p:nvSpPr>
+          <p:cNvPr id="2" name="Shape 0"/>
+          <p:cNvSpPr/>
+          <p:nvPr/>
+        </p:nvSpPr>
+        <p:spPr>
+          <a:xfrm>
+            <a:off x="11475720" y="6144768"/>
+            <a:ext cx="384048" cy="384048"/>
+          </a:xfrm>
+          <a:prstGeom prst="ellipse">
+            <a:avLst/>
+          </a:prstGeom>
+          <a:solidFill>
+            <a:srgbClr val="F4F5F7"/>
+          </a:solidFill>
+          <a:ln w="9525">
+            <a:solidFill>
+              <a:srgbClr val="D7DBE0"/>
+            </a:solidFill>
+            <a:prstDash val="solid"/>
+          </a:ln>
+        </p:spPr>
+      </p:sp>
+      <p:sp>
+        <p:nvSpPr>
+          <p:cNvPr id="3" name="Text 1"/>
+          <p:cNvSpPr txBox="1"/>
+          <p:nvPr/>
+        </p:nvSpPr>
+        <p:spPr>
+          <a:xfrm>
+            <a:off x="11475720" y="6144768"/>
+            <a:ext cx="384048" cy="384048"/>
+          </a:xfrm>
+          <a:prstGeom prst="rect">
+            <a:avLst/>
+          </a:prstGeom>
+          <a:noFill/>
+          <a:ln/>
+        </p:spPr>
+        <p:txBody>
+          <a:bodyPr wrap="square" lIns="0" tIns="0" rIns="0" bIns="0" rtlCol="0" anchor="ctr"/>
+          <a:lstStyle/>
+          <a:p>
+            <a:pPr algn="ctr" indent="0" marL="0">
+              <a:buNone/>
+            </a:pPr>
+            <a:r>
+              <a:rPr lang="en-US" sz="1000" dirty="0">
+                <a:solidFill>
+                  <a:srgbClr val="6B7785"/>
+                </a:solidFill>
+                <a:latin typeface="Malgun Gothic" pitchFamily="34" charset="0"/>
+                <a:ea typeface="Malgun Gothic" pitchFamily="34" charset="-122"/>
+                <a:cs typeface="Malgun Gothic" pitchFamily="34" charset="-120"/>
+              </a:rPr>
+              <a:t>14</a:t>
+            </a:r>
+            <a:endParaRPr lang="en-US" sz="1000" dirty="0"/>
+          </a:p>
+        </p:txBody>
+      </p:sp>
+      <p:sp>
+        <p:nvSpPr>
+          <p:cNvPr id="4" name="Text 2"/>
+          <p:cNvSpPr txBox="1"/>
+          <p:nvPr/>
+        </p:nvSpPr>
+        <p:spPr>
+          <a:xfrm>
+            <a:off x="640080" y="475488"/>
+            <a:ext cx="10911535" cy="749808"/>
+          </a:xfrm>
+          <a:prstGeom prst="rect">
+            <a:avLst/>
+          </a:prstGeom>
+          <a:noFill/>
+          <a:ln/>
+        </p:spPr>
+        <p:txBody>
+          <a:bodyPr wrap="square" lIns="0" tIns="0" rIns="0" bIns="0" rtlCol="0" anchor="ctr"/>
+          <a:lstStyle/>
+          <a:p>
+            <a:pPr indent="0" marL="0">
+              <a:buNone/>
+            </a:pPr>
+            <a:r>
+              <a:rPr lang="en-US" sz="3400" b="1" dirty="0">
+                <a:solidFill>
+                  <a:srgbClr val="1F2933"/>
+                </a:solidFill>
+                <a:latin typeface="Malgun Gothic" pitchFamily="34" charset="0"/>
+                <a:ea typeface="Malgun Gothic" pitchFamily="34" charset="-122"/>
+                <a:cs typeface="Malgun Gothic" pitchFamily="34" charset="-120"/>
+              </a:rPr>
+              <a:t>배운 것</a:t>
+            </a:r>
+            <a:endParaRPr lang="en-US" sz="3400" dirty="0"/>
+          </a:p>
+        </p:txBody>
+      </p:sp>
+      <p:sp>
+        <p:nvSpPr>
+          <p:cNvPr id="5" name="Shape 3"/>
+          <p:cNvSpPr/>
+          <p:nvPr/>
+        </p:nvSpPr>
+        <p:spPr>
+          <a:xfrm>
+            <a:off x="640080" y="1828800"/>
+            <a:ext cx="10911535" cy="658368"/>
+          </a:xfrm>
+          <a:prstGeom prst="roundRect">
+            <a:avLst>
+              <a:gd name="adj" fmla="val 8333"/>
+            </a:avLst>
+          </a:prstGeom>
+          <a:solidFill>
+            <a:srgbClr val="F4F5F7"/>
+          </a:solidFill>
+          <a:ln w="9525">
+            <a:solidFill>
+              <a:srgbClr val="D7DBE0"/>
+            </a:solidFill>
+            <a:prstDash val="solid"/>
+          </a:ln>
+        </p:spPr>
+      </p:sp>
+      <p:sp>
+        <p:nvSpPr>
+          <p:cNvPr id="6" name="Shape 4"/>
+          <p:cNvSpPr/>
+          <p:nvPr/>
+        </p:nvSpPr>
+        <p:spPr>
+          <a:xfrm>
+            <a:off x="960120" y="1984248"/>
+            <a:ext cx="347472" cy="347472"/>
+          </a:xfrm>
+          <a:prstGeom prst="ellipse">
+            <a:avLst/>
+          </a:prstGeom>
+          <a:solidFill>
+            <a:srgbClr val="FFFFFF"/>
+          </a:solidFill>
+          <a:ln w="12700">
+            <a:solidFill>
+              <a:srgbClr val="B8C0C8"/>
+            </a:solidFill>
+            <a:prstDash val="solid"/>
+          </a:ln>
+        </p:spPr>
+      </p:sp>
+      <p:sp>
+        <p:nvSpPr>
+          <p:cNvPr id="7" name="Text 5"/>
+          <p:cNvSpPr txBox="1"/>
+          <p:nvPr/>
+        </p:nvSpPr>
+        <p:spPr>
+          <a:xfrm>
+            <a:off x="960120" y="1984248"/>
+            <a:ext cx="347472" cy="347472"/>
+          </a:xfrm>
+          <a:prstGeom prst="rect">
+            <a:avLst/>
+          </a:prstGeom>
+          <a:noFill/>
+          <a:ln/>
+        </p:spPr>
+        <p:txBody>
+          <a:bodyPr wrap="square" lIns="0" tIns="0" rIns="0" bIns="0" rtlCol="0" anchor="ctr"/>
+          <a:lstStyle/>
+          <a:p>
+            <a:pPr algn="ctr" indent="0" marL="0">
+              <a:buNone/>
+            </a:pPr>
+            <a:r>
+              <a:rPr lang="en-US" sz="1150" b="1" dirty="0">
+                <a:solidFill>
+                  <a:srgbClr val="6B7785"/>
+                </a:solidFill>
+                <a:latin typeface="Malgun Gothic" pitchFamily="34" charset="0"/>
+                <a:ea typeface="Malgun Gothic" pitchFamily="34" charset="-122"/>
+                <a:cs typeface="Malgun Gothic" pitchFamily="34" charset="-120"/>
+              </a:rPr>
+              <a:t>1</a:t>
+            </a:r>
+            <a:endParaRPr lang="en-US" sz="1150" dirty="0"/>
+          </a:p>
+        </p:txBody>
+      </p:sp>
+      <p:sp>
+        <p:nvSpPr>
+          <p:cNvPr id="8" name="Text 6"/>
+          <p:cNvSpPr txBox="1"/>
+          <p:nvPr/>
+        </p:nvSpPr>
+        <p:spPr>
+          <a:xfrm>
+            <a:off x="1554480" y="1828800"/>
+            <a:ext cx="9601200" cy="658368"/>
+          </a:xfrm>
+          <a:prstGeom prst="rect">
+            <a:avLst/>
+          </a:prstGeom>
+          <a:noFill/>
+          <a:ln/>
+        </p:spPr>
+        <p:txBody>
+          <a:bodyPr wrap="square" lIns="0" tIns="0" rIns="0" bIns="0" rtlCol="0" anchor="ctr"/>
+          <a:lstStyle/>
+          <a:p>
+            <a:pPr indent="0" marL="0">
+              <a:buNone/>
+            </a:pPr>
+            <a:r>
+              <a:rPr lang="en-US" sz="1550" dirty="0">
+                <a:solidFill>
+                  <a:srgbClr val="1F2933"/>
+                </a:solidFill>
+                <a:latin typeface="Malgun Gothic" pitchFamily="34" charset="0"/>
+                <a:ea typeface="Malgun Gothic" pitchFamily="34" charset="-122"/>
+                <a:cs typeface="Malgun Gothic" pitchFamily="34" charset="-120"/>
+              </a:rPr>
+              <a:t>측정 대상을 잘못 고르면 아무리 정교하게 재도 소용없다</a:t>
+            </a:r>
+            <a:endParaRPr lang="en-US" sz="1550" dirty="0"/>
+          </a:p>
+        </p:txBody>
+      </p:sp>
+      <p:sp>
+        <p:nvSpPr>
+          <p:cNvPr id="9" name="Shape 7"/>
+          <p:cNvSpPr/>
+          <p:nvPr/>
+        </p:nvSpPr>
+        <p:spPr>
+          <a:xfrm>
+            <a:off x="640080" y="2615184"/>
+            <a:ext cx="10911535" cy="658368"/>
+          </a:xfrm>
+          <a:prstGeom prst="roundRect">
+            <a:avLst>
+              <a:gd name="adj" fmla="val 8333"/>
+            </a:avLst>
+          </a:prstGeom>
+          <a:solidFill>
+            <a:srgbClr val="F4F5F7"/>
+          </a:solidFill>
+          <a:ln w="9525">
+            <a:solidFill>
+              <a:srgbClr val="D7DBE0"/>
+            </a:solidFill>
+            <a:prstDash val="solid"/>
+          </a:ln>
+        </p:spPr>
+      </p:sp>
+      <p:sp>
+        <p:nvSpPr>
+          <p:cNvPr id="10" name="Shape 8"/>
+          <p:cNvSpPr/>
+          <p:nvPr/>
+        </p:nvSpPr>
+        <p:spPr>
+          <a:xfrm>
+            <a:off x="960120" y="2770632"/>
+            <a:ext cx="347472" cy="347472"/>
+          </a:xfrm>
+          <a:prstGeom prst="ellipse">
+            <a:avLst/>
+          </a:prstGeom>
+          <a:solidFill>
+            <a:srgbClr val="FFFFFF"/>
+          </a:solidFill>
+          <a:ln w="12700">
+            <a:solidFill>
+              <a:srgbClr val="B8C0C8"/>
+            </a:solidFill>
+            <a:prstDash val="solid"/>
+          </a:ln>
+        </p:spPr>
+      </p:sp>
+      <p:sp>
+        <p:nvSpPr>
+          <p:cNvPr id="11" name="Text 9"/>
+          <p:cNvSpPr txBox="1"/>
+          <p:nvPr/>
+        </p:nvSpPr>
+        <p:spPr>
+          <a:xfrm>
+            <a:off x="960120" y="2770632"/>
+            <a:ext cx="347472" cy="347472"/>
+          </a:xfrm>
+          <a:prstGeom prst="rect">
+            <a:avLst/>
+          </a:prstGeom>
+          <a:noFill/>
+          <a:ln/>
+        </p:spPr>
+        <p:txBody>
+          <a:bodyPr wrap="square" lIns="0" tIns="0" rIns="0" bIns="0" rtlCol="0" anchor="ctr"/>
+          <a:lstStyle/>
+          <a:p>
+            <a:pPr algn="ctr" indent="0" marL="0">
+              <a:buNone/>
+            </a:pPr>
+            <a:r>
+              <a:rPr lang="en-US" sz="1150" b="1" dirty="0">
+                <a:solidFill>
+                  <a:srgbClr val="6B7785"/>
+                </a:solidFill>
+                <a:latin typeface="Malgun Gothic" pitchFamily="34" charset="0"/>
+                <a:ea typeface="Malgun Gothic" pitchFamily="34" charset="-122"/>
+                <a:cs typeface="Malgun Gothic" pitchFamily="34" charset="-120"/>
+              </a:rPr>
+              <a:t>2</a:t>
+            </a:r>
+            <a:endParaRPr lang="en-US" sz="1150" dirty="0"/>
+          </a:p>
+        </p:txBody>
+      </p:sp>
+      <p:sp>
+        <p:nvSpPr>
+          <p:cNvPr id="12" name="Text 10"/>
+          <p:cNvSpPr txBox="1"/>
+          <p:nvPr/>
+        </p:nvSpPr>
+        <p:spPr>
+          <a:xfrm>
+            <a:off x="1554480" y="2615184"/>
+            <a:ext cx="9601200" cy="658368"/>
+          </a:xfrm>
+          <a:prstGeom prst="rect">
+            <a:avLst/>
+          </a:prstGeom>
+          <a:noFill/>
+          <a:ln/>
+        </p:spPr>
+        <p:txBody>
+          <a:bodyPr wrap="square" lIns="0" tIns="0" rIns="0" bIns="0" rtlCol="0" anchor="ctr"/>
+          <a:lstStyle/>
+          <a:p>
+            <a:pPr indent="0" marL="0">
+              <a:buNone/>
+            </a:pPr>
+            <a:r>
+              <a:rPr lang="en-US" sz="1550" dirty="0">
+                <a:solidFill>
+                  <a:srgbClr val="1F2933"/>
+                </a:solidFill>
+                <a:latin typeface="Malgun Gothic" pitchFamily="34" charset="0"/>
+                <a:ea typeface="Malgun Gothic" pitchFamily="34" charset="-122"/>
+                <a:cs typeface="Malgun Gothic" pitchFamily="34" charset="-120"/>
+              </a:rPr>
+              <a:t>쉬운 표본으로 잰 수치는 실사용을 대표하지 않는다</a:t>
+            </a:r>
+            <a:endParaRPr lang="en-US" sz="1550" dirty="0"/>
+          </a:p>
+        </p:txBody>
+      </p:sp>
+      <p:sp>
+        <p:nvSpPr>
+          <p:cNvPr id="13" name="Shape 11"/>
+          <p:cNvSpPr/>
+          <p:nvPr/>
+        </p:nvSpPr>
+        <p:spPr>
+          <a:xfrm>
+            <a:off x="640080" y="3401568"/>
+            <a:ext cx="10911535" cy="658368"/>
+          </a:xfrm>
+          <a:prstGeom prst="roundRect">
+            <a:avLst>
+              <a:gd name="adj" fmla="val 8333"/>
+            </a:avLst>
+          </a:prstGeom>
+          <a:solidFill>
+            <a:srgbClr val="F4F5F7"/>
+          </a:solidFill>
+          <a:ln w="9525">
+            <a:solidFill>
+              <a:srgbClr val="D7DBE0"/>
+            </a:solidFill>
+            <a:prstDash val="solid"/>
+          </a:ln>
+        </p:spPr>
+      </p:sp>
+      <p:sp>
+        <p:nvSpPr>
+          <p:cNvPr id="14" name="Shape 12"/>
+          <p:cNvSpPr/>
+          <p:nvPr/>
+        </p:nvSpPr>
+        <p:spPr>
+          <a:xfrm>
+            <a:off x="960120" y="3557016"/>
+            <a:ext cx="347472" cy="347472"/>
+          </a:xfrm>
+          <a:prstGeom prst="ellipse">
+            <a:avLst/>
+          </a:prstGeom>
+          <a:solidFill>
+            <a:srgbClr val="FFFFFF"/>
+          </a:solidFill>
+          <a:ln w="12700">
+            <a:solidFill>
+              <a:srgbClr val="B8C0C8"/>
+            </a:solidFill>
+            <a:prstDash val="solid"/>
+          </a:ln>
+        </p:spPr>
+      </p:sp>
+      <p:sp>
+        <p:nvSpPr>
+          <p:cNvPr id="15" name="Text 13"/>
+          <p:cNvSpPr txBox="1"/>
+          <p:nvPr/>
+        </p:nvSpPr>
+        <p:spPr>
+          <a:xfrm>
+            <a:off x="960120" y="3557016"/>
+            <a:ext cx="347472" cy="347472"/>
+          </a:xfrm>
+          <a:prstGeom prst="rect">
+            <a:avLst/>
+          </a:prstGeom>
+          <a:noFill/>
+          <a:ln/>
+        </p:spPr>
+        <p:txBody>
+          <a:bodyPr wrap="square" lIns="0" tIns="0" rIns="0" bIns="0" rtlCol="0" anchor="ctr"/>
+          <a:lstStyle/>
+          <a:p>
+            <a:pPr algn="ctr" indent="0" marL="0">
+              <a:buNone/>
+            </a:pPr>
+            <a:r>
+              <a:rPr lang="en-US" sz="1150" b="1" dirty="0">
+                <a:solidFill>
+                  <a:srgbClr val="6B7785"/>
+                </a:solidFill>
+                <a:latin typeface="Malgun Gothic" pitchFamily="34" charset="0"/>
+                <a:ea typeface="Malgun Gothic" pitchFamily="34" charset="-122"/>
+                <a:cs typeface="Malgun Gothic" pitchFamily="34" charset="-120"/>
+              </a:rPr>
+              <a:t>3</a:t>
+            </a:r>
+            <a:endParaRPr lang="en-US" sz="1150" dirty="0"/>
+          </a:p>
+        </p:txBody>
+      </p:sp>
+      <p:sp>
+        <p:nvSpPr>
+          <p:cNvPr id="16" name="Text 14"/>
+          <p:cNvSpPr txBox="1"/>
+          <p:nvPr/>
+        </p:nvSpPr>
+        <p:spPr>
+          <a:xfrm>
+            <a:off x="1554480" y="3401568"/>
+            <a:ext cx="9601200" cy="658368"/>
+          </a:xfrm>
+          <a:prstGeom prst="rect">
+            <a:avLst/>
+          </a:prstGeom>
+          <a:noFill/>
+          <a:ln/>
+        </p:spPr>
+        <p:txBody>
+          <a:bodyPr wrap="square" lIns="0" tIns="0" rIns="0" bIns="0" rtlCol="0" anchor="ctr"/>
+          <a:lstStyle/>
+          <a:p>
+            <a:pPr indent="0" marL="0">
+              <a:buNone/>
+            </a:pPr>
+            <a:r>
+              <a:rPr lang="en-US" sz="1550" dirty="0">
+                <a:solidFill>
+                  <a:srgbClr val="1F2933"/>
+                </a:solidFill>
+                <a:latin typeface="Malgun Gothic" pitchFamily="34" charset="0"/>
+                <a:ea typeface="Malgun Gothic" pitchFamily="34" charset="-122"/>
+                <a:cs typeface="Malgun Gothic" pitchFamily="34" charset="-120"/>
+              </a:rPr>
+              <a:t>검증 조건은 실제 사용 조건과 같아야 한다</a:t>
+            </a:r>
+            <a:endParaRPr lang="en-US" sz="1550" dirty="0"/>
+          </a:p>
+        </p:txBody>
+      </p:sp>
+      <p:sp>
+        <p:nvSpPr>
+          <p:cNvPr id="17" name="Shape 15"/>
+          <p:cNvSpPr/>
+          <p:nvPr/>
+        </p:nvSpPr>
+        <p:spPr>
+          <a:xfrm>
+            <a:off x="640080" y="4187952"/>
+            <a:ext cx="10911535" cy="658368"/>
+          </a:xfrm>
+          <a:prstGeom prst="roundRect">
+            <a:avLst>
+              <a:gd name="adj" fmla="val 8333"/>
+            </a:avLst>
+          </a:prstGeom>
+          <a:solidFill>
+            <a:srgbClr val="F4F5F7"/>
+          </a:solidFill>
+          <a:ln w="9525">
+            <a:solidFill>
+              <a:srgbClr val="D7DBE0"/>
+            </a:solidFill>
+            <a:prstDash val="solid"/>
+          </a:ln>
+        </p:spPr>
+      </p:sp>
+      <p:sp>
+        <p:nvSpPr>
+          <p:cNvPr id="18" name="Shape 16"/>
+          <p:cNvSpPr/>
+          <p:nvPr/>
+        </p:nvSpPr>
+        <p:spPr>
+          <a:xfrm>
+            <a:off x="960120" y="4343400"/>
+            <a:ext cx="347472" cy="347472"/>
+          </a:xfrm>
+          <a:prstGeom prst="ellipse">
+            <a:avLst/>
+          </a:prstGeom>
+          <a:solidFill>
+            <a:srgbClr val="FFFFFF"/>
+          </a:solidFill>
+          <a:ln w="12700">
+            <a:solidFill>
+              <a:srgbClr val="B8C0C8"/>
+            </a:solidFill>
+            <a:prstDash val="solid"/>
+          </a:ln>
+        </p:spPr>
+      </p:sp>
+      <p:sp>
+        <p:nvSpPr>
+          <p:cNvPr id="19" name="Text 17"/>
+          <p:cNvSpPr txBox="1"/>
+          <p:nvPr/>
+        </p:nvSpPr>
+        <p:spPr>
+          <a:xfrm>
+            <a:off x="960120" y="4343400"/>
+            <a:ext cx="347472" cy="347472"/>
+          </a:xfrm>
+          <a:prstGeom prst="rect">
+            <a:avLst/>
+          </a:prstGeom>
+          <a:noFill/>
+          <a:ln/>
+        </p:spPr>
+        <p:txBody>
+          <a:bodyPr wrap="square" lIns="0" tIns="0" rIns="0" bIns="0" rtlCol="0" anchor="ctr"/>
+          <a:lstStyle/>
+          <a:p>
+            <a:pPr algn="ctr" indent="0" marL="0">
+              <a:buNone/>
+            </a:pPr>
+            <a:r>
+              <a:rPr lang="en-US" sz="1150" b="1" dirty="0">
+                <a:solidFill>
+                  <a:srgbClr val="6B7785"/>
+                </a:solidFill>
+                <a:latin typeface="Malgun Gothic" pitchFamily="34" charset="0"/>
+                <a:ea typeface="Malgun Gothic" pitchFamily="34" charset="-122"/>
+                <a:cs typeface="Malgun Gothic" pitchFamily="34" charset="-120"/>
+              </a:rPr>
+              <a:t>4</a:t>
+            </a:r>
+            <a:endParaRPr lang="en-US" sz="1150" dirty="0"/>
+          </a:p>
+        </p:txBody>
+      </p:sp>
+      <p:sp>
+        <p:nvSpPr>
+          <p:cNvPr id="20" name="Text 18"/>
+          <p:cNvSpPr txBox="1"/>
+          <p:nvPr/>
+        </p:nvSpPr>
+        <p:spPr>
+          <a:xfrm>
+            <a:off x="1554480" y="4187952"/>
+            <a:ext cx="9601200" cy="658368"/>
+          </a:xfrm>
+          <a:prstGeom prst="rect">
+            <a:avLst/>
+          </a:prstGeom>
+          <a:noFill/>
+          <a:ln/>
+        </p:spPr>
+        <p:txBody>
+          <a:bodyPr wrap="square" lIns="0" tIns="0" rIns="0" bIns="0" rtlCol="0" anchor="ctr"/>
+          <a:lstStyle/>
+          <a:p>
+            <a:pPr indent="0" marL="0">
+              <a:buNone/>
+            </a:pPr>
+            <a:r>
+              <a:rPr lang="en-US" sz="1550" dirty="0">
+                <a:solidFill>
+                  <a:srgbClr val="1F2933"/>
+                </a:solidFill>
+                <a:latin typeface="Malgun Gothic" pitchFamily="34" charset="0"/>
+                <a:ea typeface="Malgun Gothic" pitchFamily="34" charset="-122"/>
+                <a:cs typeface="Malgun Gothic" pitchFamily="34" charset="-120"/>
+              </a:rPr>
+              <a:t>전체 평균은 정작 필요한 것을 가린다</a:t>
+            </a:r>
+            <a:endParaRPr lang="en-US" sz="1550" dirty="0"/>
+          </a:p>
+        </p:txBody>
+      </p:sp>
+      <p:sp>
+        <p:nvSpPr>
+          <p:cNvPr id="21" name="Shape 19"/>
+          <p:cNvSpPr/>
+          <p:nvPr/>
+        </p:nvSpPr>
+        <p:spPr>
+          <a:xfrm>
+            <a:off x="640080" y="4974336"/>
+            <a:ext cx="10911535" cy="658368"/>
+          </a:xfrm>
+          <a:prstGeom prst="roundRect">
+            <a:avLst>
+              <a:gd name="adj" fmla="val 8333"/>
+            </a:avLst>
+          </a:prstGeom>
+          <a:solidFill>
+            <a:srgbClr val="EAF3F3"/>
+          </a:solidFill>
+          <a:ln w="9525">
+            <a:solidFill>
+              <a:srgbClr val="BFDBDA"/>
+            </a:solidFill>
+            <a:prstDash val="solid"/>
+          </a:ln>
+        </p:spPr>
+      </p:sp>
+      <p:sp>
+        <p:nvSpPr>
+          <p:cNvPr id="22" name="Shape 20"/>
+          <p:cNvSpPr/>
+          <p:nvPr/>
+        </p:nvSpPr>
+        <p:spPr>
+          <a:xfrm>
+            <a:off x="960120" y="5129784"/>
+            <a:ext cx="347472" cy="347472"/>
+          </a:xfrm>
+          <a:prstGeom prst="ellipse">
+            <a:avLst/>
+          </a:prstGeom>
+          <a:solidFill>
+            <a:srgbClr val="0E7C7B"/>
+          </a:solidFill>
+          <a:ln w="12700">
+            <a:solidFill>
+              <a:srgbClr val="0E7C7B"/>
+            </a:solidFill>
+            <a:prstDash val="solid"/>
+          </a:ln>
+        </p:spPr>
+      </p:sp>
+      <p:sp>
+        <p:nvSpPr>
+          <p:cNvPr id="23" name="Text 21"/>
+          <p:cNvSpPr txBox="1"/>
+          <p:nvPr/>
+        </p:nvSpPr>
+        <p:spPr>
+          <a:xfrm>
+            <a:off x="960120" y="5129784"/>
+            <a:ext cx="347472" cy="347472"/>
+          </a:xfrm>
+          <a:prstGeom prst="rect">
+            <a:avLst/>
+          </a:prstGeom>
+          <a:noFill/>
+          <a:ln/>
+        </p:spPr>
+        <p:txBody>
+          <a:bodyPr wrap="square" lIns="0" tIns="0" rIns="0" bIns="0" rtlCol="0" anchor="ctr"/>
+          <a:lstStyle/>
+          <a:p>
+            <a:pPr algn="ctr" indent="0" marL="0">
+              <a:buNone/>
+            </a:pPr>
+            <a:r>
+              <a:rPr lang="en-US" sz="1150" b="1" dirty="0">
+                <a:solidFill>
+                  <a:srgbClr val="FFFFFF"/>
+                </a:solidFill>
+                <a:latin typeface="Malgun Gothic" pitchFamily="34" charset="0"/>
+                <a:ea typeface="Malgun Gothic" pitchFamily="34" charset="-122"/>
+                <a:cs typeface="Malgun Gothic" pitchFamily="34" charset="-120"/>
+              </a:rPr>
+              <a:t>5</a:t>
+            </a:r>
+            <a:endParaRPr lang="en-US" sz="1150" dirty="0"/>
+          </a:p>
+        </p:txBody>
+      </p:sp>
+      <p:sp>
+        <p:nvSpPr>
+          <p:cNvPr id="24" name="Text 22"/>
+          <p:cNvSpPr txBox="1"/>
+          <p:nvPr/>
+        </p:nvSpPr>
+        <p:spPr>
+          <a:xfrm>
+            <a:off x="1554480" y="4974336"/>
+            <a:ext cx="9601200" cy="658368"/>
+          </a:xfrm>
+          <a:prstGeom prst="rect">
+            <a:avLst/>
+          </a:prstGeom>
+          <a:noFill/>
+          <a:ln/>
+        </p:spPr>
+        <p:txBody>
+          <a:bodyPr wrap="square" lIns="0" tIns="0" rIns="0" bIns="0" rtlCol="0" anchor="ctr"/>
+          <a:lstStyle/>
+          <a:p>
+            <a:pPr indent="0" marL="0">
+              <a:buNone/>
+            </a:pPr>
+            <a:r>
+              <a:rPr lang="en-US" sz="1700" b="1" dirty="0">
+                <a:solidFill>
+                  <a:srgbClr val="0E7C7B"/>
+                </a:solidFill>
+                <a:latin typeface="Malgun Gothic" pitchFamily="34" charset="0"/>
+                <a:ea typeface="Malgun Gothic" pitchFamily="34" charset="-122"/>
+                <a:cs typeface="Malgun Gothic" pitchFamily="34" charset="-120"/>
+              </a:rPr>
+              <a:t>성능을 못 올리면 약속을 바꾼다</a:t>
+            </a:r>
+            <a:endParaRPr lang="en-US" sz="1700" dirty="0"/>
+          </a:p>
+        </p:txBody>
+      </p:sp>
+      <p:sp>
+        <p:nvSpPr>
+          <p:cNvPr id="25" name="Text 23"/>
+          <p:cNvSpPr txBox="1"/>
+          <p:nvPr/>
+        </p:nvSpPr>
+        <p:spPr>
+          <a:xfrm>
+            <a:off x="640080" y="5870448"/>
+            <a:ext cx="10180015" cy="457200"/>
+          </a:xfrm>
+          <a:prstGeom prst="rect">
+            <a:avLst/>
+          </a:prstGeom>
+          <a:noFill/>
+          <a:ln/>
+        </p:spPr>
+        <p:txBody>
+          <a:bodyPr wrap="square" lIns="0" tIns="0" rIns="0" bIns="0" rtlCol="0" anchor="ctr"/>
+          <a:lstStyle/>
+          <a:p>
+            <a:pPr indent="0" marL="0">
+              <a:buNone/>
+            </a:pPr>
+            <a:r>
+              <a:rPr lang="en-US" sz="1400" dirty="0">
+                <a:solidFill>
+                  <a:srgbClr val="1F2933"/>
+                </a:solidFill>
+                <a:latin typeface="Malgun Gothic" pitchFamily="34" charset="0"/>
+                <a:ea typeface="Malgun Gothic" pitchFamily="34" charset="-122"/>
+                <a:cs typeface="Malgun Gothic" pitchFamily="34" charset="-120"/>
+              </a:rPr>
+              <a:t>확신도를 표시할 근거가 없으면 표시를 없애는 것이 사용자에게 정직하다.</a:t>
+            </a:r>
+            <a:endParaRPr lang="en-US" sz="1400" dirty="0"/>
+          </a:p>
+        </p:txBody>
+      </p:sp>
+    </p:spTree>
+  </p:cSld>
+  <p:clrMapOvr>
+    <a:masterClrMapping/>
+  </p:clrMapOvr>
+</p:sld>
+</file>
+
+<file path=ppt/slides/slide15.xml><?xml version="1.0" encoding="utf-8"?>
+<p:sld xmlns:a="http://schemas.openxmlformats.org/drawingml/2006/main" xmlns:r="http://schemas.openxmlformats.org/officeDocument/2006/relationships" xmlns:p="http://schemas.openxmlformats.org/presentationml/2006/main">
+  <p:cSld name="Slide 15">
     <p:bg>
       <p:bgPr>
         <a:solidFill>
@@ -5165,7 +6380,7 @@
                 <a:ea typeface="Malgun Gothic" pitchFamily="34" charset="-122"/>
                 <a:cs typeface="Malgun Gothic" pitchFamily="34" charset="-120"/>
               </a:rPr>
-              <a:t>14</a:t>
+              <a:t>15</a:t>
             </a:r>
             <a:endParaRPr lang="en-US" sz="1000" dirty="0"/>
           </a:p>
@@ -5404,7 +6619,7 @@
                 <a:ea typeface="Malgun Gothic" pitchFamily="34" charset="-122"/>
                 <a:cs typeface="Malgun Gothic" pitchFamily="34" charset="-120"/>
               </a:rPr>
-              <a:t>4,370</a:t>
+              <a:t>4,391</a:t>
             </a:r>
             <a:endParaRPr lang="en-US" sz="2800" dirty="0"/>
           </a:p>
@@ -5560,7 +6775,7 @@
                 <a:ea typeface="Malgun Gothic" pitchFamily="34" charset="-122"/>
                 <a:cs typeface="Malgun Gothic" pitchFamily="34" charset="-120"/>
               </a:rPr>
-              <a:t>54</a:t>
+              <a:t>61</a:t>
             </a:r>
             <a:endParaRPr lang="en-US" sz="2800" dirty="0"/>
           </a:p>
@@ -8301,7 +9516,7 @@
                 <a:ea typeface="Malgun Gothic" pitchFamily="34" charset="-122"/>
                 <a:cs typeface="Malgun Gothic" pitchFamily="34" charset="-120"/>
               </a:rPr>
-              <a:t>원문과 조문을 좌우로 나란히</a:t>
+              <a:t>사진으로 올려도 된다</a:t>
             </a:r>
             <a:endParaRPr lang="en-US" sz="1400" dirty="0"/>
           </a:p>
@@ -8340,7 +9555,7 @@
                 <a:ea typeface="Malgun Gothic" pitchFamily="34" charset="-122"/>
                 <a:cs typeface="Malgun Gothic" pitchFamily="34" charset="-120"/>
               </a:rPr>
-              <a:t>가리지 않고 그대로 보여준다</a:t>
+              <a:t>브라우저 안에서 읽고 사람이 고친다</a:t>
             </a:r>
             <a:endParaRPr lang="en-US" sz="1100" dirty="0"/>
           </a:p>
@@ -8438,7 +9653,7 @@
                 <a:ea typeface="Malgun Gothic" pitchFamily="34" charset="-122"/>
                 <a:cs typeface="Malgun Gothic" pitchFamily="34" charset="-120"/>
               </a:rPr>
-              <a:t>후보를 누르면 조문 원문</a:t>
+              <a:t>원문과 조문을 좌우로 나란히</a:t>
             </a:r>
             <a:endParaRPr lang="en-US" sz="1400" dirty="0"/>
           </a:p>
@@ -8477,7 +9692,7 @@
                 <a:ea typeface="Malgun Gothic" pitchFamily="34" charset="-122"/>
                 <a:cs typeface="Malgun Gothic" pitchFamily="34" charset="-120"/>
               </a:rPr>
-              <a:t>각 호 · 효력 · 쉬운 안내 · 용어 풀이</a:t>
+              <a:t>가리지 않고 그대로 보여준다</a:t>
             </a:r>
             <a:endParaRPr lang="en-US" sz="1100" dirty="0"/>
           </a:p>
@@ -8575,7 +9790,7 @@
                 <a:ea typeface="Malgun Gothic" pitchFamily="34" charset="-122"/>
                 <a:cs typeface="Malgun Gothic" pitchFamily="34" charset="-120"/>
               </a:rPr>
-              <a:t>건너뛴 조항도 이유를 밝힌다</a:t>
+              <a:t>후보를 누르면 조문 원문</a:t>
             </a:r>
             <a:endParaRPr lang="en-US" sz="1400" dirty="0"/>
           </a:p>
@@ -8614,7 +9829,7 @@
                 <a:ea typeface="Malgun Gothic" pitchFamily="34" charset="-122"/>
                 <a:cs typeface="Malgun Gothic" pitchFamily="34" charset="-120"/>
               </a:rPr>
-              <a:t>조용히 버리지 않는다</a:t>
+              <a:t>각 호 · 효력 · 쉬운 안내 · 용어 풀이</a:t>
             </a:r>
             <a:endParaRPr lang="en-US" sz="1100" dirty="0"/>
           </a:p>
